--- a/courses/learn_clustering/module01-03-greedy-pair-merge/slides.pptx
+++ b/courses/learn_clustering/module01-03-greedy-pair-merge/slides.pptx
@@ -515,12 +515,6 @@
               <a:t>Greedy pair merge is the simplest coarsening engine that still feels like CAD: repeatedly merge the most attractive pair, update the graph, and stop when you hit a cluster count. You’ll watch the full loop on the tiny graph—affinity, contraction, and cutsize moving together.</a:t>
             </a:r>
           </a:p>
-          <a:p/>
-          <a:p>
-            <a:r>
-              <a:t>&lt;!-- algorithm-walkthrough --&gt;</a:t>
-            </a:r>
-          </a:p>
         </p:txBody>
       </p:sp>
       <p:sp>
@@ -939,12 +933,6 @@
           <a:p>
             <a:r>
               <a:t>Cut edges are C–D and C–E—total three. Greedy locked in the natural communities without backtracking. Capacity two would have blocked the size-three cluster.</a:t>
-            </a:r>
-          </a:p>
-          <a:p/>
-          <a:p>
-            <a:r>
-              <a:t>&lt;!-- /algorithm-walkthrough --&gt;</a:t>
             </a:r>
           </a:p>
         </p:txBody>
@@ -5837,7 +5825,7 @@
                 <a:spcPts val="2200"/>
               </a:lnSpc>
               <a:spcAft>
-                <a:spcPts val="600"/>
+                <a:spcPts val="400"/>
               </a:spcAft>
             </a:pPr>
             <a:r>
@@ -5856,7 +5844,7 @@
                 <a:spcPts val="2200"/>
               </a:lnSpc>
               <a:spcAft>
-                <a:spcPts val="600"/>
+                <a:spcPts val="400"/>
               </a:spcAft>
             </a:pPr>
             <a:r>
@@ -5875,7 +5863,7 @@
                 <a:spcPts val="2200"/>
               </a:lnSpc>
               <a:spcAft>
-                <a:spcPts val="600"/>
+                <a:spcPts val="400"/>
               </a:spcAft>
             </a:pPr>
             <a:r>
@@ -5894,7 +5882,7 @@
                 <a:spcPts val="2200"/>
               </a:lnSpc>
               <a:spcAft>
-                <a:spcPts val="600"/>
+                <a:spcPts val="400"/>
               </a:spcAft>
             </a:pPr>
             <a:r>
@@ -5913,7 +5901,7 @@
                 <a:spcPts val="2200"/>
               </a:lnSpc>
               <a:spcAft>
-                <a:spcPts val="600"/>
+                <a:spcPts val="400"/>
               </a:spcAft>
             </a:pPr>
             <a:r>
@@ -5932,7 +5920,7 @@
                 <a:spcPts val="2200"/>
               </a:lnSpc>
               <a:spcAft>
-                <a:spcPts val="600"/>
+                <a:spcPts val="400"/>
               </a:spcAft>
             </a:pPr>
             <a:r>
@@ -5951,7 +5939,7 @@
                 <a:spcPts val="2200"/>
               </a:lnSpc>
               <a:spcAft>
-                <a:spcPts val="600"/>
+                <a:spcPts val="400"/>
               </a:spcAft>
             </a:pPr>
             <a:r>
@@ -5970,7 +5958,7 @@
                 <a:spcPts val="2200"/>
               </a:lnSpc>
               <a:spcAft>
-                <a:spcPts val="600"/>
+                <a:spcPts val="400"/>
               </a:spcAft>
             </a:pPr>
             <a:r>
@@ -5989,26 +5977,7 @@
                 <a:spcPts val="2200"/>
               </a:lnSpc>
               <a:spcAft>
-                <a:spcPts val="600"/>
-              </a:spcAft>
-            </a:pPr>
-            <a:r>
-              <a:rPr sz="2000" b="0">
-                <a:solidFill>
-                  <a:srgbClr val="333333"/>
-                </a:solidFill>
-                <a:latin typeface="Consolas"/>
-              </a:rPr>
-              <a:t/>
-            </a:r>
-          </a:p>
-          <a:p>
-            <a:pPr>
-              <a:lnSpc>
-                <a:spcPts val="2200"/>
-              </a:lnSpc>
-              <a:spcAft>
-                <a:spcPts val="600"/>
+                <a:spcPts val="400"/>
               </a:spcAft>
             </a:pPr>
             <a:r>
